--- a/CalendarioAgo25/Ejercicios/E13_NAT/Ejercicio13.pptx
+++ b/CalendarioAgo25/Ejercicios/E13_NAT/Ejercicio13.pptx
@@ -136,6 +136,35 @@
 </p:presentation>
 </file>
 
+<file path=ppt/changesInfos/changesInfo1.xml><?xml version="1.0" encoding="utf-8"?>
+<pc:chgInfo xmlns:a="http://schemas.openxmlformats.org/drawingml/2006/main" xmlns:r="http://schemas.openxmlformats.org/officeDocument/2006/relationships" xmlns:ac="http://schemas.microsoft.com/office/drawing/2013/main/command" xmlns:pc="http://schemas.microsoft.com/office/powerpoint/2013/main/command">
+  <pc:docChgLst>
+    <pc:chgData name="Lizethe Pérez Fuertes" userId="4ae9ef87-2a7d-42f8-8dfa-0a501a9e2ff4" providerId="ADAL" clId="{FDDD45CB-1330-4033-A842-3D2746AFF7C7}"/>
+    <pc:docChg chg="modSld">
+      <pc:chgData name="Lizethe Pérez Fuertes" userId="4ae9ef87-2a7d-42f8-8dfa-0a501a9e2ff4" providerId="ADAL" clId="{FDDD45CB-1330-4033-A842-3D2746AFF7C7}" dt="2025-11-12T15:21:46.952" v="1" actId="1076"/>
+      <pc:docMkLst>
+        <pc:docMk/>
+      </pc:docMkLst>
+      <pc:sldChg chg="modSp mod">
+        <pc:chgData name="Lizethe Pérez Fuertes" userId="4ae9ef87-2a7d-42f8-8dfa-0a501a9e2ff4" providerId="ADAL" clId="{FDDD45CB-1330-4033-A842-3D2746AFF7C7}" dt="2025-11-12T15:21:46.952" v="1" actId="1076"/>
+        <pc:sldMkLst>
+          <pc:docMk/>
+          <pc:sldMk cId="1223009868" sldId="346"/>
+        </pc:sldMkLst>
+        <pc:picChg chg="mod">
+          <ac:chgData name="Lizethe Pérez Fuertes" userId="4ae9ef87-2a7d-42f8-8dfa-0a501a9e2ff4" providerId="ADAL" clId="{FDDD45CB-1330-4033-A842-3D2746AFF7C7}" dt="2025-11-12T15:21:46.952" v="1" actId="1076"/>
+          <ac:picMkLst>
+            <pc:docMk/>
+            <pc:sldMk cId="1223009868" sldId="346"/>
+            <ac:picMk id="3" creationId="{0000CABD-1879-6B76-9FB2-78ACB6816D16}"/>
+          </ac:picMkLst>
+        </pc:picChg>
+      </pc:sldChg>
+    </pc:docChg>
+  </pc:docChgLst>
+</pc:chgInfo>
+</file>
+
 <file path=ppt/notesMasters/notesMaster1.xml><?xml version="1.0" encoding="utf-8"?>
 <p:notesMaster xmlns:a="http://schemas.openxmlformats.org/drawingml/2006/main" xmlns:r="http://schemas.openxmlformats.org/officeDocument/2006/relationships" xmlns:p="http://schemas.openxmlformats.org/presentationml/2006/main">
   <p:cSld>
@@ -218,7 +247,7 @@
           <a:p>
             <a:fld id="{2D445F07-8756-451B-A938-0248325FC7BB}" type="datetimeFigureOut">
               <a:rPr lang="es-MX" smtClean="0"/>
-              <a:t>26/05/2025</a:t>
+              <a:t>12/11/2025</a:t>
             </a:fld>
             <a:endParaRPr lang="es-MX" dirty="0"/>
           </a:p>
@@ -377,7 +406,7 @@
           <a:p>
             <a:fld id="{5993AEC0-242E-4FA7-9D3C-51E1036AC3CB}" type="slidenum">
               <a:rPr lang="es-MX" smtClean="0"/>
-              <a:t>‹#›</a:t>
+              <a:t>‹Nº›</a:t>
             </a:fld>
             <a:endParaRPr lang="es-MX" dirty="0"/>
           </a:p>
@@ -835,7 +864,7 @@
           <a:p>
             <a:fld id="{5E75A0DC-66C6-4CEC-A5EB-F8C97CEC3796}" type="datetimeFigureOut">
               <a:rPr lang="es-MX" smtClean="0"/>
-              <a:t>26/05/2025</a:t>
+              <a:t>12/11/2025</a:t>
             </a:fld>
             <a:endParaRPr lang="es-MX" dirty="0"/>
           </a:p>
@@ -877,7 +906,7 @@
           <a:p>
             <a:fld id="{C077EE1E-7A06-4E7F-9AFB-189FC69B7B0C}" type="slidenum">
               <a:rPr lang="es-MX" smtClean="0"/>
-              <a:t>‹#›</a:t>
+              <a:t>‹Nº›</a:t>
             </a:fld>
             <a:endParaRPr lang="es-MX" dirty="0"/>
           </a:p>
@@ -1005,7 +1034,7 @@
           <a:p>
             <a:fld id="{5E75A0DC-66C6-4CEC-A5EB-F8C97CEC3796}" type="datetimeFigureOut">
               <a:rPr lang="es-MX" smtClean="0"/>
-              <a:t>26/05/2025</a:t>
+              <a:t>12/11/2025</a:t>
             </a:fld>
             <a:endParaRPr lang="es-MX" dirty="0"/>
           </a:p>
@@ -1047,7 +1076,7 @@
           <a:p>
             <a:fld id="{C077EE1E-7A06-4E7F-9AFB-189FC69B7B0C}" type="slidenum">
               <a:rPr lang="es-MX" smtClean="0"/>
-              <a:t>‹#›</a:t>
+              <a:t>‹Nº›</a:t>
             </a:fld>
             <a:endParaRPr lang="es-MX" dirty="0"/>
           </a:p>
@@ -1185,7 +1214,7 @@
           <a:p>
             <a:fld id="{5E75A0DC-66C6-4CEC-A5EB-F8C97CEC3796}" type="datetimeFigureOut">
               <a:rPr lang="es-MX" smtClean="0"/>
-              <a:t>26/05/2025</a:t>
+              <a:t>12/11/2025</a:t>
             </a:fld>
             <a:endParaRPr lang="es-MX" dirty="0"/>
           </a:p>
@@ -1227,7 +1256,7 @@
           <a:p>
             <a:fld id="{C077EE1E-7A06-4E7F-9AFB-189FC69B7B0C}" type="slidenum">
               <a:rPr lang="es-MX" smtClean="0"/>
-              <a:t>‹#›</a:t>
+              <a:t>‹Nº›</a:t>
             </a:fld>
             <a:endParaRPr lang="es-MX" dirty="0"/>
           </a:p>
@@ -1355,7 +1384,7 @@
           <a:p>
             <a:fld id="{5E75A0DC-66C6-4CEC-A5EB-F8C97CEC3796}" type="datetimeFigureOut">
               <a:rPr lang="es-MX" smtClean="0"/>
-              <a:t>26/05/2025</a:t>
+              <a:t>12/11/2025</a:t>
             </a:fld>
             <a:endParaRPr lang="es-MX" dirty="0"/>
           </a:p>
@@ -1397,7 +1426,7 @@
           <a:p>
             <a:fld id="{C077EE1E-7A06-4E7F-9AFB-189FC69B7B0C}" type="slidenum">
               <a:rPr lang="es-MX" smtClean="0"/>
-              <a:t>‹#›</a:t>
+              <a:t>‹Nº›</a:t>
             </a:fld>
             <a:endParaRPr lang="es-MX" dirty="0"/>
           </a:p>
@@ -1601,7 +1630,7 @@
           <a:p>
             <a:fld id="{5E75A0DC-66C6-4CEC-A5EB-F8C97CEC3796}" type="datetimeFigureOut">
               <a:rPr lang="es-MX" smtClean="0"/>
-              <a:t>26/05/2025</a:t>
+              <a:t>12/11/2025</a:t>
             </a:fld>
             <a:endParaRPr lang="es-MX" dirty="0"/>
           </a:p>
@@ -1643,7 +1672,7 @@
           <a:p>
             <a:fld id="{C077EE1E-7A06-4E7F-9AFB-189FC69B7B0C}" type="slidenum">
               <a:rPr lang="es-MX" smtClean="0"/>
-              <a:t>‹#›</a:t>
+              <a:t>‹Nº›</a:t>
             </a:fld>
             <a:endParaRPr lang="es-MX" dirty="0"/>
           </a:p>
@@ -1889,7 +1918,7 @@
           <a:p>
             <a:fld id="{5E75A0DC-66C6-4CEC-A5EB-F8C97CEC3796}" type="datetimeFigureOut">
               <a:rPr lang="es-MX" smtClean="0"/>
-              <a:t>26/05/2025</a:t>
+              <a:t>12/11/2025</a:t>
             </a:fld>
             <a:endParaRPr lang="es-MX" dirty="0"/>
           </a:p>
@@ -1931,7 +1960,7 @@
           <a:p>
             <a:fld id="{C077EE1E-7A06-4E7F-9AFB-189FC69B7B0C}" type="slidenum">
               <a:rPr lang="es-MX" smtClean="0"/>
-              <a:t>‹#›</a:t>
+              <a:t>‹Nº›</a:t>
             </a:fld>
             <a:endParaRPr lang="es-MX" dirty="0"/>
           </a:p>
@@ -2311,7 +2340,7 @@
           <a:p>
             <a:fld id="{5E75A0DC-66C6-4CEC-A5EB-F8C97CEC3796}" type="datetimeFigureOut">
               <a:rPr lang="es-MX" smtClean="0"/>
-              <a:t>26/05/2025</a:t>
+              <a:t>12/11/2025</a:t>
             </a:fld>
             <a:endParaRPr lang="es-MX" dirty="0"/>
           </a:p>
@@ -2353,7 +2382,7 @@
           <a:p>
             <a:fld id="{C077EE1E-7A06-4E7F-9AFB-189FC69B7B0C}" type="slidenum">
               <a:rPr lang="es-MX" smtClean="0"/>
-              <a:t>‹#›</a:t>
+              <a:t>‹Nº›</a:t>
             </a:fld>
             <a:endParaRPr lang="es-MX" dirty="0"/>
           </a:p>
@@ -2429,7 +2458,7 @@
           <a:p>
             <a:fld id="{5E75A0DC-66C6-4CEC-A5EB-F8C97CEC3796}" type="datetimeFigureOut">
               <a:rPr lang="es-MX" smtClean="0"/>
-              <a:t>26/05/2025</a:t>
+              <a:t>12/11/2025</a:t>
             </a:fld>
             <a:endParaRPr lang="es-MX" dirty="0"/>
           </a:p>
@@ -2471,7 +2500,7 @@
           <a:p>
             <a:fld id="{C077EE1E-7A06-4E7F-9AFB-189FC69B7B0C}" type="slidenum">
               <a:rPr lang="es-MX" smtClean="0"/>
-              <a:t>‹#›</a:t>
+              <a:t>‹Nº›</a:t>
             </a:fld>
             <a:endParaRPr lang="es-MX" dirty="0"/>
           </a:p>
@@ -2524,7 +2553,7 @@
           <a:p>
             <a:fld id="{5E75A0DC-66C6-4CEC-A5EB-F8C97CEC3796}" type="datetimeFigureOut">
               <a:rPr lang="es-MX" smtClean="0"/>
-              <a:t>26/05/2025</a:t>
+              <a:t>12/11/2025</a:t>
             </a:fld>
             <a:endParaRPr lang="es-MX" dirty="0"/>
           </a:p>
@@ -2566,7 +2595,7 @@
           <a:p>
             <a:fld id="{C077EE1E-7A06-4E7F-9AFB-189FC69B7B0C}" type="slidenum">
               <a:rPr lang="es-MX" smtClean="0"/>
-              <a:t>‹#›</a:t>
+              <a:t>‹Nº›</a:t>
             </a:fld>
             <a:endParaRPr lang="es-MX" dirty="0"/>
           </a:p>
@@ -2801,7 +2830,7 @@
           <a:p>
             <a:fld id="{5E75A0DC-66C6-4CEC-A5EB-F8C97CEC3796}" type="datetimeFigureOut">
               <a:rPr lang="es-MX" smtClean="0"/>
-              <a:t>26/05/2025</a:t>
+              <a:t>12/11/2025</a:t>
             </a:fld>
             <a:endParaRPr lang="es-MX" dirty="0"/>
           </a:p>
@@ -2843,7 +2872,7 @@
           <a:p>
             <a:fld id="{C077EE1E-7A06-4E7F-9AFB-189FC69B7B0C}" type="slidenum">
               <a:rPr lang="es-MX" smtClean="0"/>
-              <a:t>‹#›</a:t>
+              <a:t>‹Nº›</a:t>
             </a:fld>
             <a:endParaRPr lang="es-MX" dirty="0"/>
           </a:p>
@@ -3054,7 +3083,7 @@
           <a:p>
             <a:fld id="{5E75A0DC-66C6-4CEC-A5EB-F8C97CEC3796}" type="datetimeFigureOut">
               <a:rPr lang="es-MX" smtClean="0"/>
-              <a:t>26/05/2025</a:t>
+              <a:t>12/11/2025</a:t>
             </a:fld>
             <a:endParaRPr lang="es-MX" dirty="0"/>
           </a:p>
@@ -3096,7 +3125,7 @@
           <a:p>
             <a:fld id="{C077EE1E-7A06-4E7F-9AFB-189FC69B7B0C}" type="slidenum">
               <a:rPr lang="es-MX" smtClean="0"/>
-              <a:t>‹#›</a:t>
+              <a:t>‹Nº›</a:t>
             </a:fld>
             <a:endParaRPr lang="es-MX" dirty="0"/>
           </a:p>
@@ -3267,7 +3296,7 @@
           <a:p>
             <a:fld id="{5E75A0DC-66C6-4CEC-A5EB-F8C97CEC3796}" type="datetimeFigureOut">
               <a:rPr lang="es-MX" smtClean="0"/>
-              <a:t>26/05/2025</a:t>
+              <a:t>12/11/2025</a:t>
             </a:fld>
             <a:endParaRPr lang="es-MX" dirty="0"/>
           </a:p>
@@ -3345,7 +3374,7 @@
           <a:p>
             <a:fld id="{C077EE1E-7A06-4E7F-9AFB-189FC69B7B0C}" type="slidenum">
               <a:rPr lang="es-MX" smtClean="0"/>
-              <a:t>‹#›</a:t>
+              <a:t>‹Nº›</a:t>
             </a:fld>
             <a:endParaRPr lang="es-MX" dirty="0"/>
           </a:p>
@@ -9215,7 +9244,7 @@
         </p:blipFill>
         <p:spPr>
           <a:xfrm>
-            <a:off x="125760" y="2996952"/>
+            <a:off x="125760" y="3256158"/>
             <a:ext cx="8892480" cy="3006665"/>
           </a:xfrm>
           <a:prstGeom prst="rect">
